--- a/02. Planificacion/Cronograma de alto nivel - Hitos.pptx
+++ b/02. Planificacion/Cronograma de alto nivel - Hitos.pptx
@@ -3801,7 +3801,7 @@
             <a:avLst/>
           </a:prstGeom>
           <a:solidFill>
-            <a:srgbClr val="ED7D31"/>
+            <a:srgbClr val="5B84B1"/>
           </a:solidFill>
           <a:ln>
             <a:noFill/>
@@ -3977,7 +3977,7 @@
             <a:avLst/>
           </a:prstGeom>
           <a:solidFill>
-            <a:srgbClr val="C00000"/>
+            <a:srgbClr val="8C2F39"/>
           </a:solidFill>
           <a:ln>
             <a:noFill/>
@@ -4022,7 +4022,7 @@
           </a:prstGeom>
           <a:ln w="9525">
             <a:solidFill>
-              <a:srgbClr val="C00000"/>
+              <a:srgbClr val="8C2F39"/>
             </a:solidFill>
           </a:ln>
         </p:spPr>
@@ -4103,7 +4103,7 @@
             <a:avLst/>
           </a:prstGeom>
           <a:solidFill>
-            <a:srgbClr val="C00000"/>
+            <a:srgbClr val="8C2F39"/>
           </a:solidFill>
           <a:ln>
             <a:noFill/>
@@ -4148,7 +4148,7 @@
           </a:prstGeom>
           <a:ln w="9525">
             <a:solidFill>
-              <a:srgbClr val="C00000"/>
+              <a:srgbClr val="8C2F39"/>
             </a:solidFill>
           </a:ln>
         </p:spPr>
@@ -4229,7 +4229,7 @@
             <a:avLst/>
           </a:prstGeom>
           <a:solidFill>
-            <a:srgbClr val="C00000"/>
+            <a:srgbClr val="8C2F39"/>
           </a:solidFill>
           <a:ln>
             <a:noFill/>
@@ -4274,7 +4274,7 @@
           </a:prstGeom>
           <a:ln w="9525">
             <a:solidFill>
-              <a:srgbClr val="C00000"/>
+              <a:srgbClr val="8C2F39"/>
             </a:solidFill>
           </a:ln>
         </p:spPr>
@@ -4348,7 +4348,7 @@
         </p:nvCxnSpPr>
         <p:spPr>
           <a:xfrm>
-            <a:off x="4039985" y="1453896"/>
+            <a:off x="5092930" y="1453896"/>
             <a:ext cx="0" cy="1700784"/>
           </a:xfrm>
           <a:prstGeom prst="line">
@@ -4356,7 +4356,7 @@
           </a:prstGeom>
           <a:ln w="15875">
             <a:solidFill>
-              <a:srgbClr val="C00000"/>
+              <a:srgbClr val="8C2F39"/>
             </a:solidFill>
             <a:prstDash val="dash"/>
           </a:ln>
@@ -4384,7 +4384,7 @@
         </p:nvSpPr>
         <p:spPr>
           <a:xfrm>
-            <a:off x="3674225" y="914400"/>
+            <a:off x="4727170" y="914400"/>
             <a:ext cx="731520" cy="201168"/>
           </a:xfrm>
           <a:prstGeom prst="rect">
@@ -4402,11 +4402,11 @@
             <a:r>
               <a:rPr sz="800" b="1" i="0">
                 <a:solidFill>
-                  <a:srgbClr val="C00000"/>
+                  <a:srgbClr val="8C2F39"/>
                 </a:solidFill>
                 <a:latin typeface="Calibri"/>
               </a:rPr>
-              <a:t>Hoy 11 oct</a:t>
+              <a:t>Hoy 16 oct</a:t>
             </a:r>
           </a:p>
         </p:txBody>
